--- a/dist/초5/수학/곱셈과어림/초5_수학_곱셈과어림_04_분수끼리의곱셈.pptx
+++ b/dist/초5/수학/곱셈과어림/초5_수학_곱셈과어림_04_분수끼리의곱셈.pptx
@@ -121,13 +121,13 @@
   <p:extLst>
     <p:ext uri="{521415D9-36F7-43E2-AB2F-B90AF26B5E84}">
       <p14:sectionLst xmlns:p14="http://schemas.microsoft.com/office/powerpoint/2010/main">
-        <p14:section name="도입" id="{eade342d-4a0d-233c-13a5-8fae977c5307}">
+        <p14:section name="도입" id="{a47b824b-c98e-ad38-f11b-555fb5513f81}">
           <p14:sldIdLst>
             <p14:sldId id="256"/>
             <p14:sldId id="257"/>
           </p14:sldIdLst>
         </p14:section>
-        <p14:section name="개념" id="{e9cdfeb0-9c1f-5748-c9f0-36647a01fde1}">
+        <p14:section name="개념" id="{e8b38acc-0894-bc7c-d546-f3fdd92c2368}">
           <p14:sldIdLst>
             <p14:sldId id="258"/>
             <p14:sldId id="259"/>
@@ -136,32 +136,32 @@
             <p14:sldId id="263"/>
           </p14:sldIdLst>
         </p14:section>
-        <p14:section name="연습" id="{9e0c71b7-60a7-4771-1eea-9827c66fd086}">
+        <p14:section name="연습" id="{3c1c826a-eb7b-9ae0-030d-90c2eb170016}">
           <p14:sldIdLst>
             <p14:sldId id="261"/>
             <p14:sldId id="264"/>
             <p14:sldId id="265"/>
           </p14:sldIdLst>
         </p14:section>
-        <p14:section name="개념" id="{3eb0a345-e014-9c71-ec72-2795c40ee4bc}">
+        <p14:section name="개념" id="{d433b4a9-41e2-9d0e-23e9-bdabec4ce4bc}">
           <p14:sldIdLst/>
         </p14:section>
-        <p14:section name="연습" id="{d7212444-c231-cd8d-840a-37de4559a1f5}">
+        <p14:section name="연습" id="{b986fab0-bab5-2150-d0a2-f075390b20e4}">
           <p14:sldIdLst/>
         </p14:section>
-        <p14:section name="확인" id="{b39c55ae-c378-8d86-72ea-278591dcf77e}">
+        <p14:section name="확인" id="{8810aeda-545a-0c71-2304-3bf275197ba9}">
           <p14:sldIdLst>
             <p14:sldId id="266"/>
             <p14:sldId id="267"/>
             <p14:sldId id="268"/>
           </p14:sldIdLst>
         </p14:section>
-        <p14:section name="정리" id="{04a5aa3e-e7cf-f68b-ac22-69dc2d6991d0}">
+        <p14:section name="정리" id="{77bdafce-57db-bc27-9598-c1200ce21305}">
           <p14:sldIdLst>
             <p14:sldId id="269"/>
           </p14:sldIdLst>
         </p14:section>
-        <p14:section name="보충" id="{4b487feb-d36c-3e8c-b37a-7b8bbcd9b485}">
+        <p14:section name="보충" id="{75917abf-2d10-b512-5b5b-f18d1afc4e3f}">
           <p14:sldIdLst>
             <p14:sldId id="270"/>
           </p14:sldIdLst>
